--- a/slides/kyuyaku-data_presentation.pptx
+++ b/slides/kyuyaku-data_presentation.pptx
@@ -11213,7 +11213,7 @@
                   <a:schemeClr val="bg1"/>
                 </a:solidFill>
               </a:rPr>
-              <a:t>梅谷 直亨 (外科医)</a:t>
+              <a:t>梅谷 直亨 (うめたに なおゆき; Naoyuki Umetani MD, PhD)</a:t>
             </a:r>
             <a:endParaRPr lang="ja-JP" sz="1600" dirty="0"/>
           </a:p>
